--- a/Documentation/JHC PPT.pptx
+++ b/Documentation/JHC PPT.pptx
@@ -5969,7 +5969,7 @@
         <p:spPr>
           <a:xfrm>
             <a:off x="311700" y="2834125"/>
-            <a:ext cx="8520600" cy="792600"/>
+            <a:ext cx="8520600" cy="1147200"/>
           </a:xfrm>
           <a:prstGeom prst="rect">
             <a:avLst/>
@@ -5977,7 +5977,7 @@
         </p:spPr>
         <p:txBody>
           <a:bodyPr anchorCtr="0" anchor="t" bIns="91425" lIns="91425" spcFirstLastPara="1" rIns="91425" wrap="square" tIns="91425">
-            <a:normAutofit/>
+            <a:normAutofit lnSpcReduction="10000"/>
           </a:bodyPr>
           <a:lstStyle/>
           <a:p>
@@ -5996,7 +5996,7 @@
                   <a:schemeClr val="lt1"/>
                 </a:solidFill>
               </a:rPr>
-              <a:t>Project title</a:t>
+              <a:t>Case Study 23. GigGuide: Independent Music Ticketing</a:t>
             </a:r>
             <a:endParaRPr b="1">
               <a:solidFill>
@@ -6028,7 +6028,7 @@
                   <a:schemeClr val="lt1"/>
                 </a:solidFill>
               </a:rPr>
-              <a:t>y Stduent Name/Group Name</a:t>
+              <a:t>y Rishi Thakker</a:t>
             </a:r>
             <a:endParaRPr b="1" sz="832">
               <a:solidFill>
